--- a/regression_deck/Deck4_Reduction_Results.pptx
+++ b/regression_deck/Deck4_Reduction_Results.pptx
@@ -2562,8 +2562,8 @@
         </p:blipFill>
         <p:spPr>
           <a:xfrm>
-            <a:off x="379476" y="2694214"/>
-            <a:ext cx="11430000" cy="2612571"/>
+            <a:off x="2088533" y="1371600"/>
+            <a:ext cx="8011886" cy="5257800"/>
           </a:xfrm>
           <a:prstGeom prst="rect">
             <a:avLst/>
